--- a/instructor/slides/pptx/lectures/L02.pptx
+++ b/instructor/slides/pptx/lectures/L02.pptx
@@ -3878,8 +3878,8 @@
         </p:nvSpPr>
         <p:spPr>
           <a:xfrm>
-            <a:off x="640080" y="1920240"/>
-            <a:ext cx="10972800" cy="1463040"/>
+            <a:off x="640080" y="1828800"/>
+            <a:ext cx="6675120" cy="1645920"/>
           </a:xfrm>
           <a:prstGeom prst="rect">
             <a:avLst/>
@@ -3893,7 +3893,7 @@
           <a:lstStyle/>
           <a:p>
             <a:r>
-              <a:rPr sz="4400" b="1">
+              <a:rPr sz="4000" b="1">
                 <a:solidFill>
                   <a:srgbClr val="FFFFFF"/>
                 </a:solidFill>
@@ -3912,8 +3912,8 @@
         </p:nvSpPr>
         <p:spPr>
           <a:xfrm>
-            <a:off x="640080" y="3657600"/>
-            <a:ext cx="10789920" cy="1097280"/>
+            <a:off x="640080" y="3794760"/>
+            <a:ext cx="6675120" cy="1097280"/>
           </a:xfrm>
           <a:prstGeom prst="rect">
             <a:avLst/>
@@ -3927,7 +3927,7 @@
           <a:lstStyle/>
           <a:p>
             <a:r>
-              <a:rPr sz="2000" b="0">
+              <a:rPr sz="1800" b="0">
                 <a:solidFill>
                   <a:srgbClr val="B7CBDE"/>
                 </a:solidFill>
@@ -3946,8 +3946,8 @@
         </p:nvSpPr>
         <p:spPr>
           <a:xfrm>
-            <a:off x="640080" y="5029200"/>
-            <a:ext cx="10972800" cy="457200"/>
+            <a:off x="640080" y="5120640"/>
+            <a:ext cx="6766560" cy="457200"/>
           </a:xfrm>
           <a:prstGeom prst="rect">
             <a:avLst/>
@@ -3961,7 +3961,7 @@
           <a:lstStyle/>
           <a:p>
             <a:r>
-              <a:rPr sz="1600" b="0">
+              <a:rPr sz="1500" b="0">
                 <a:solidFill>
                   <a:srgbClr val="3EC6FF"/>
                 </a:solidFill>
@@ -3972,6 +3972,30 @@
           </a:p>
         </p:txBody>
       </p:sp>
+      <p:pic>
+        <p:nvPicPr>
+          <p:cNvPr id="7" name="Picture 6" descr="dw-pause.jpg"/>
+          <p:cNvPicPr>
+            <a:picLocks noChangeAspect="1"/>
+          </p:cNvPicPr>
+          <p:nvPr/>
+        </p:nvPicPr>
+        <p:blipFill>
+          <a:blip r:embed="rId2"/>
+          <a:stretch>
+            <a:fillRect/>
+          </a:stretch>
+        </p:blipFill>
+        <p:spPr>
+          <a:xfrm>
+            <a:off x="7452360" y="1325880"/>
+            <a:ext cx="4160520" cy="4160520"/>
+          </a:xfrm>
+          <a:prstGeom prst="rect">
+            <a:avLst/>
+          </a:prstGeom>
+        </p:spPr>
+      </p:pic>
     </p:spTree>
   </p:cSld>
   <p:clrMapOvr>
@@ -4075,8 +4099,8 @@
         </p:nvSpPr>
         <p:spPr>
           <a:xfrm>
-            <a:off x="640080" y="685800"/>
-            <a:ext cx="10972800" cy="1463040"/>
+            <a:off x="640080" y="658368"/>
+            <a:ext cx="7863840" cy="1645920"/>
           </a:xfrm>
           <a:prstGeom prst="rect">
             <a:avLst/>
@@ -4090,7 +4114,7 @@
           <a:lstStyle/>
           <a:p>
             <a:r>
-              <a:rPr sz="3200" b="1">
+              <a:rPr sz="3000" b="1">
                 <a:solidFill>
                   <a:srgbClr val="FFFFFF"/>
                 </a:solidFill>
@@ -4109,8 +4133,8 @@
         </p:nvSpPr>
         <p:spPr>
           <a:xfrm>
-            <a:off x="777240" y="2286000"/>
-            <a:ext cx="10607040" cy="4754880"/>
+            <a:off x="777240" y="2331720"/>
+            <a:ext cx="7498079" cy="4754880"/>
           </a:xfrm>
           <a:prstGeom prst="rect">
             <a:avLst/>
@@ -4129,7 +4153,7 @@
               </a:spcAft>
             </a:pPr>
             <a:r>
-              <a:rPr sz="2400" b="0">
+              <a:rPr sz="2200" b="0">
                 <a:solidFill>
                   <a:srgbClr val="FFFFFF"/>
                 </a:solidFill>
@@ -4140,6 +4164,30 @@
           </a:p>
         </p:txBody>
       </p:sp>
+      <p:pic>
+        <p:nvPicPr>
+          <p:cNvPr id="6" name="Picture 5" descr="dw-pause.jpg"/>
+          <p:cNvPicPr>
+            <a:picLocks noChangeAspect="1"/>
+          </p:cNvPicPr>
+          <p:nvPr/>
+        </p:nvPicPr>
+        <p:blipFill>
+          <a:blip r:embed="rId2"/>
+          <a:stretch>
+            <a:fillRect/>
+          </a:stretch>
+        </p:blipFill>
+        <p:spPr>
+          <a:xfrm>
+            <a:off x="8732520" y="2057400"/>
+            <a:ext cx="2880360" cy="2880360"/>
+          </a:xfrm>
+          <a:prstGeom prst="rect">
+            <a:avLst/>
+          </a:prstGeom>
+        </p:spPr>
+      </p:pic>
     </p:spTree>
   </p:cSld>
   <p:clrMapOvr>
@@ -4243,8 +4291,8 @@
         </p:nvSpPr>
         <p:spPr>
           <a:xfrm>
-            <a:off x="640080" y="685800"/>
-            <a:ext cx="10972800" cy="1463040"/>
+            <a:off x="640080" y="658368"/>
+            <a:ext cx="7863840" cy="1645920"/>
           </a:xfrm>
           <a:prstGeom prst="rect">
             <a:avLst/>
@@ -4258,7 +4306,7 @@
           <a:lstStyle/>
           <a:p>
             <a:r>
-              <a:rPr sz="3200" b="1">
+              <a:rPr sz="3000" b="1">
                 <a:solidFill>
                   <a:srgbClr val="FFFFFF"/>
                 </a:solidFill>
@@ -4277,8 +4325,8 @@
         </p:nvSpPr>
         <p:spPr>
           <a:xfrm>
-            <a:off x="777240" y="2286000"/>
-            <a:ext cx="10607040" cy="4754880"/>
+            <a:off x="777240" y="2331720"/>
+            <a:ext cx="7498079" cy="4754880"/>
           </a:xfrm>
           <a:prstGeom prst="rect">
             <a:avLst/>
@@ -4297,7 +4345,7 @@
               </a:spcAft>
             </a:pPr>
             <a:r>
-              <a:rPr sz="2400" b="0">
+              <a:rPr sz="2200" b="0">
                 <a:solidFill>
                   <a:srgbClr val="FFFFFF"/>
                 </a:solidFill>
@@ -4313,7 +4361,7 @@
               </a:spcAft>
             </a:pPr>
             <a:r>
-              <a:rPr sz="2400" b="0">
+              <a:rPr sz="2200" b="0">
                 <a:solidFill>
                   <a:srgbClr val="FFFFFF"/>
                 </a:solidFill>
@@ -4329,7 +4377,7 @@
               </a:spcAft>
             </a:pPr>
             <a:r>
-              <a:rPr sz="2400" b="0">
+              <a:rPr sz="2200" b="0">
                 <a:solidFill>
                   <a:srgbClr val="FFFFFF"/>
                 </a:solidFill>
@@ -4345,7 +4393,7 @@
               </a:spcAft>
             </a:pPr>
             <a:r>
-              <a:rPr sz="2400" b="0">
+              <a:rPr sz="2200" b="0">
                 <a:solidFill>
                   <a:srgbClr val="FFFFFF"/>
                 </a:solidFill>
@@ -4356,6 +4404,30 @@
           </a:p>
         </p:txBody>
       </p:sp>
+      <p:pic>
+        <p:nvPicPr>
+          <p:cNvPr id="6" name="Picture 5" descr="dw-pause.jpg"/>
+          <p:cNvPicPr>
+            <a:picLocks noChangeAspect="1"/>
+          </p:cNvPicPr>
+          <p:nvPr/>
+        </p:nvPicPr>
+        <p:blipFill>
+          <a:blip r:embed="rId2"/>
+          <a:stretch>
+            <a:fillRect/>
+          </a:stretch>
+        </p:blipFill>
+        <p:spPr>
+          <a:xfrm>
+            <a:off x="8732520" y="2057400"/>
+            <a:ext cx="2880360" cy="2880360"/>
+          </a:xfrm>
+          <a:prstGeom prst="rect">
+            <a:avLst/>
+          </a:prstGeom>
+        </p:spPr>
+      </p:pic>
     </p:spTree>
   </p:cSld>
   <p:clrMapOvr>
@@ -4459,8 +4531,8 @@
         </p:nvSpPr>
         <p:spPr>
           <a:xfrm>
-            <a:off x="640080" y="685800"/>
-            <a:ext cx="10972800" cy="1463040"/>
+            <a:off x="640080" y="658368"/>
+            <a:ext cx="7863840" cy="1645920"/>
           </a:xfrm>
           <a:prstGeom prst="rect">
             <a:avLst/>
@@ -4474,7 +4546,7 @@
           <a:lstStyle/>
           <a:p>
             <a:r>
-              <a:rPr sz="3200" b="1">
+              <a:rPr sz="3000" b="1">
                 <a:solidFill>
                   <a:srgbClr val="FFFFFF"/>
                 </a:solidFill>
@@ -4493,8 +4565,8 @@
         </p:nvSpPr>
         <p:spPr>
           <a:xfrm>
-            <a:off x="777240" y="2286000"/>
-            <a:ext cx="10607040" cy="4754880"/>
+            <a:off x="777240" y="2331720"/>
+            <a:ext cx="7498079" cy="4754880"/>
           </a:xfrm>
           <a:prstGeom prst="rect">
             <a:avLst/>
@@ -4513,7 +4585,7 @@
               </a:spcAft>
             </a:pPr>
             <a:r>
-              <a:rPr sz="2400" b="0">
+              <a:rPr sz="2200" b="0">
                 <a:solidFill>
                   <a:srgbClr val="FFFFFF"/>
                 </a:solidFill>
@@ -4529,7 +4601,7 @@
               </a:spcAft>
             </a:pPr>
             <a:r>
-              <a:rPr sz="2400" b="0">
+              <a:rPr sz="2200" b="0">
                 <a:solidFill>
                   <a:srgbClr val="FFFFFF"/>
                 </a:solidFill>
@@ -4545,7 +4617,7 @@
               </a:spcAft>
             </a:pPr>
             <a:r>
-              <a:rPr sz="2400" b="0">
+              <a:rPr sz="2200" b="0">
                 <a:solidFill>
                   <a:srgbClr val="FFFFFF"/>
                 </a:solidFill>
@@ -4561,7 +4633,7 @@
               </a:spcAft>
             </a:pPr>
             <a:r>
-              <a:rPr sz="2400" b="0">
+              <a:rPr sz="2200" b="0">
                 <a:solidFill>
                   <a:srgbClr val="FFFFFF"/>
                 </a:solidFill>
@@ -4572,6 +4644,30 @@
           </a:p>
         </p:txBody>
       </p:sp>
+      <p:pic>
+        <p:nvPicPr>
+          <p:cNvPr id="6" name="Picture 5" descr="dw-pause.jpg"/>
+          <p:cNvPicPr>
+            <a:picLocks noChangeAspect="1"/>
+          </p:cNvPicPr>
+          <p:nvPr/>
+        </p:nvPicPr>
+        <p:blipFill>
+          <a:blip r:embed="rId2"/>
+          <a:stretch>
+            <a:fillRect/>
+          </a:stretch>
+        </p:blipFill>
+        <p:spPr>
+          <a:xfrm>
+            <a:off x="8732520" y="2057400"/>
+            <a:ext cx="2880360" cy="2880360"/>
+          </a:xfrm>
+          <a:prstGeom prst="rect">
+            <a:avLst/>
+          </a:prstGeom>
+        </p:spPr>
+      </p:pic>
     </p:spTree>
   </p:cSld>
   <p:clrMapOvr>
@@ -4675,8 +4771,8 @@
         </p:nvSpPr>
         <p:spPr>
           <a:xfrm>
-            <a:off x="640080" y="685800"/>
-            <a:ext cx="10972800" cy="1463040"/>
+            <a:off x="640080" y="658368"/>
+            <a:ext cx="7863840" cy="1645920"/>
           </a:xfrm>
           <a:prstGeom prst="rect">
             <a:avLst/>
@@ -4690,7 +4786,7 @@
           <a:lstStyle/>
           <a:p>
             <a:r>
-              <a:rPr sz="3200" b="1">
+              <a:rPr sz="3000" b="1">
                 <a:solidFill>
                   <a:srgbClr val="FFFFFF"/>
                 </a:solidFill>
@@ -4709,8 +4805,8 @@
         </p:nvSpPr>
         <p:spPr>
           <a:xfrm>
-            <a:off x="777240" y="2286000"/>
-            <a:ext cx="10607040" cy="4754880"/>
+            <a:off x="777240" y="2331720"/>
+            <a:ext cx="7498079" cy="4754880"/>
           </a:xfrm>
           <a:prstGeom prst="rect">
             <a:avLst/>
@@ -4729,7 +4825,7 @@
               </a:spcAft>
             </a:pPr>
             <a:r>
-              <a:rPr sz="2400" b="0">
+              <a:rPr sz="2200" b="0">
                 <a:solidFill>
                   <a:srgbClr val="FFFFFF"/>
                 </a:solidFill>
@@ -4745,7 +4841,7 @@
               </a:spcAft>
             </a:pPr>
             <a:r>
-              <a:rPr sz="2400" b="0">
+              <a:rPr sz="2200" b="0">
                 <a:solidFill>
                   <a:srgbClr val="FFFFFF"/>
                 </a:solidFill>
@@ -4761,7 +4857,7 @@
               </a:spcAft>
             </a:pPr>
             <a:r>
-              <a:rPr sz="2400" b="0">
+              <a:rPr sz="2200" b="0">
                 <a:solidFill>
                   <a:srgbClr val="FFFFFF"/>
                 </a:solidFill>
@@ -4777,7 +4873,7 @@
               </a:spcAft>
             </a:pPr>
             <a:r>
-              <a:rPr sz="2400" b="0">
+              <a:rPr sz="2200" b="0">
                 <a:solidFill>
                   <a:srgbClr val="FFFFFF"/>
                 </a:solidFill>
@@ -4788,6 +4884,30 @@
           </a:p>
         </p:txBody>
       </p:sp>
+      <p:pic>
+        <p:nvPicPr>
+          <p:cNvPr id="6" name="Picture 5" descr="dw-pause.jpg"/>
+          <p:cNvPicPr>
+            <a:picLocks noChangeAspect="1"/>
+          </p:cNvPicPr>
+          <p:nvPr/>
+        </p:nvPicPr>
+        <p:blipFill>
+          <a:blip r:embed="rId2"/>
+          <a:stretch>
+            <a:fillRect/>
+          </a:stretch>
+        </p:blipFill>
+        <p:spPr>
+          <a:xfrm>
+            <a:off x="8732520" y="2057400"/>
+            <a:ext cx="2880360" cy="2880360"/>
+          </a:xfrm>
+          <a:prstGeom prst="rect">
+            <a:avLst/>
+          </a:prstGeom>
+        </p:spPr>
+      </p:pic>
     </p:spTree>
   </p:cSld>
   <p:clrMapOvr>
@@ -4891,8 +5011,8 @@
         </p:nvSpPr>
         <p:spPr>
           <a:xfrm>
-            <a:off x="640080" y="685800"/>
-            <a:ext cx="10972800" cy="1463040"/>
+            <a:off x="640080" y="658368"/>
+            <a:ext cx="7863840" cy="1645920"/>
           </a:xfrm>
           <a:prstGeom prst="rect">
             <a:avLst/>
@@ -4906,7 +5026,7 @@
           <a:lstStyle/>
           <a:p>
             <a:r>
-              <a:rPr sz="3200" b="1">
+              <a:rPr sz="3000" b="1">
                 <a:solidFill>
                   <a:srgbClr val="FFFFFF"/>
                 </a:solidFill>
@@ -4925,8 +5045,8 @@
         </p:nvSpPr>
         <p:spPr>
           <a:xfrm>
-            <a:off x="777240" y="2286000"/>
-            <a:ext cx="10607040" cy="4754880"/>
+            <a:off x="777240" y="2331720"/>
+            <a:ext cx="7498079" cy="4754880"/>
           </a:xfrm>
           <a:prstGeom prst="rect">
             <a:avLst/>
@@ -4945,7 +5065,7 @@
               </a:spcAft>
             </a:pPr>
             <a:r>
-              <a:rPr sz="2400" b="0">
+              <a:rPr sz="2200" b="0">
                 <a:solidFill>
                   <a:srgbClr val="FFFFFF"/>
                 </a:solidFill>
@@ -4956,6 +5076,30 @@
           </a:p>
         </p:txBody>
       </p:sp>
+      <p:pic>
+        <p:nvPicPr>
+          <p:cNvPr id="6" name="Picture 5" descr="dw-pause.jpg"/>
+          <p:cNvPicPr>
+            <a:picLocks noChangeAspect="1"/>
+          </p:cNvPicPr>
+          <p:nvPr/>
+        </p:nvPicPr>
+        <p:blipFill>
+          <a:blip r:embed="rId2"/>
+          <a:stretch>
+            <a:fillRect/>
+          </a:stretch>
+        </p:blipFill>
+        <p:spPr>
+          <a:xfrm>
+            <a:off x="8732520" y="2057400"/>
+            <a:ext cx="2880360" cy="2880360"/>
+          </a:xfrm>
+          <a:prstGeom prst="rect">
+            <a:avLst/>
+          </a:prstGeom>
+        </p:spPr>
+      </p:pic>
     </p:spTree>
   </p:cSld>
   <p:clrMapOvr>
